--- a/DBTUNING/ch26_V뷰인스턴스튜닝1_절차와통계/ch26_V뷰_인스턴스튜닝_절차와통계.pptx
+++ b/DBTUNING/ch26_V뷰인스턴스튜닝1_절차와통계/ch26_V뷰_인스턴스튜닝_절차와통계.pptx
@@ -959,7 +959,7 @@
           <a:lstStyle/>
           <a:p>
             <a:r>
-              <a:t>부하 통계를 볼 때는 어느 것을 어떤 분모로 정규화하는지가 해석을 좌우한다. session logical reads는 작업량의 대표 지표이고 user commits는 트랜잭션당 정규화의 분모가 된다. 트랜잭션당 논리읽기가 기준선보다 커졌다면 같은 한 건의 업무가 더 많은 블록을 읽는다는 뜻으로, 실행계획 악화나 데이터량 증가를 의심한다. sorts disk가 상당수면 PGA 작업 영역 부족을 의심해 19장으로 넘어간다는 연결도 언급한다.</a:t>
+              <a:t>부하 통계를 볼 때는 어느 것을 어떤 분모로 정규화하는지가 해석을 좌우한다. session logical reads는 작업량의 대표 지표이고 user commits는 트랜잭션당 정규화의 분모가 된다. 트랜잭션당 논리읽기가 기준선보다 커졌다면 같은 한 건의 업무가 더 많은 블록을 읽는다는 뜻으로, 실행계획 악화나 데이터량 증가를 의심한다. sorts disk가 상당수면 PGA 작업 영역 부족을 의심해 ch33으로 넘어간다는 연결도 언급한다.</a:t>
             </a:r>
           </a:p>
         </p:txBody>
@@ -1519,7 +1519,7 @@
           <a:lstStyle/>
           <a:p>
             <a:r>
-              <a:t>이 장의 모든 조회가 향하는 하나의 태도를 정리한다. 절대값은 판정 근거가 아니다. 세 오판을 든다. 누적값을 그냥 많다고 단정하는 것, buffer_gets 절대값 상위만 손대는 것, 부하 증가로 통계가 커진 것을 성능 저하로 오독하는 것이다. 1장에서 경계한 히트율 신앙도 같은 부류다. 나쁜 SQL이 같은 블록을 반복 논리읽기하면 히트율이 오히려 오른다. 이 오판들의 공통 뿌리는 맥락 없는 숫자에 의미를 부여하는 조급함이라는 점을 강조한다.</a:t>
+              <a:t>이 장의 모든 조회가 향하는 하나의 태도를 정리한다. 절대값은 판정 근거가 아니다. 세 오판을 든다. 누적값을 그냥 많다고 단정하는 것, buffer_gets 절대값 상위만 손대는 것, 부하 증가로 통계가 커진 것을 성능 저하로 오독하는 것이다. ch15에서 경계한 히트율 신앙도 같은 부류다. 나쁜 SQL이 같은 블록을 반복 논리읽기하면 히트율이 오히려 오른다. 이 오판들의 공통 뿌리는 맥락 없는 숫자에 의미를 부여하는 조급함이라는 점을 강조한다.</a:t>
             </a:r>
           </a:p>
         </p:txBody>
@@ -5599,7 +5599,7 @@
                 <a:latin typeface="맑은 고딕"/>
                 <a:ea typeface="맑은 고딕"/>
               </a:rPr>
-              <a:t>제13장</a:t>
+              <a:t>제ch26</a:t>
             </a:r>
           </a:p>
         </p:txBody>

--- a/DBTUNING/ch26_V뷰인스턴스튜닝1_절차와통계/ch26_V뷰_인스턴스튜닝_절차와통계.pptx
+++ b/DBTUNING/ch26_V뷰인스턴스튜닝1_절차와통계/ch26_V뷰_인스턴스튜닝_절차와통계.pptx
@@ -5599,7 +5599,7 @@
                 <a:latin typeface="맑은 고딕"/>
                 <a:ea typeface="맑은 고딕"/>
               </a:rPr>
-              <a:t>제ch26</a:t>
+              <a:t>ch26</a:t>
             </a:r>
           </a:p>
         </p:txBody>

--- a/DBTUNING/ch26_V뷰인스턴스튜닝1_절차와통계/ch26_V뷰_인스턴스튜닝_절차와통계.pptx
+++ b/DBTUNING/ch26_V뷰인스턴스튜닝1_절차와통계/ch26_V뷰_인스턴스튜닝_절차와통계.pptx
@@ -7629,7 +7629,7 @@
                 <a:latin typeface="맑은 고딕"/>
                 <a:ea typeface="맑은 고딕"/>
               </a:rPr>
-              <a:t>13.4</a:t>
+              <a:t>26.4</a:t>
             </a:r>
           </a:p>
         </p:txBody>
@@ -10078,7 +10078,7 @@
                 <a:latin typeface="맑은 고딕"/>
                 <a:ea typeface="맑은 고딕"/>
               </a:rPr>
-              <a:t>13.5</a:t>
+              <a:t>26.5</a:t>
             </a:r>
           </a:p>
         </p:txBody>
@@ -11037,7 +11037,7 @@
                 <a:latin typeface="맑은 고딕"/>
                 <a:ea typeface="맑은 고딕"/>
               </a:rPr>
-              <a:t>13.6</a:t>
+              <a:t>26.6</a:t>
             </a:r>
           </a:p>
         </p:txBody>
@@ -11337,7 +11337,7 @@
                 <a:latin typeface="맑은 고딕"/>
                 <a:ea typeface="맑은 고딕"/>
               </a:rPr>
-              <a:t>•  13.2  인스턴스 튜닝의 절차 — 무엇을 순서로 하는가</a:t>
+              <a:t>•  26.2  인스턴스 튜닝의 절차 — 무엇을 순서로 하는가</a:t>
             </a:r>
           </a:p>
           <a:p>
@@ -11354,7 +11354,7 @@
                 <a:latin typeface="맑은 고딕"/>
                 <a:ea typeface="맑은 고딕"/>
               </a:rPr>
-              <a:t>•  13.3  실시간 진단 경로 — 세션 → 대기 → SQL → 세그먼트</a:t>
+              <a:t>•  26.3  실시간 진단 경로 — 세션 → 대기 → SQL → 세그먼트</a:t>
             </a:r>
           </a:p>
           <a:p>
@@ -11371,7 +11371,7 @@
                 <a:latin typeface="맑은 고딕"/>
                 <a:ea typeface="맑은 고딕"/>
               </a:rPr>
-              <a:t>•  13.4  V$SYSSTAT — 시스템 통계 읽기(누적값·델타·정규화)</a:t>
+              <a:t>•  26.4  V$SYSSTAT — 시스템 통계 읽기(누적값·델타·정규화)</a:t>
             </a:r>
           </a:p>
           <a:p>
@@ -11388,7 +11388,7 @@
                 <a:latin typeface="맑은 고딕"/>
                 <a:ea typeface="맑은 고딕"/>
               </a:rPr>
-              <a:t>•  13.5  V$SQL — 상위 부하 SQL 선별</a:t>
+              <a:t>•  26.5  V$SQL — 상위 부하 SQL 선별</a:t>
             </a:r>
           </a:p>
           <a:p>
@@ -11405,7 +11405,7 @@
                 <a:latin typeface="맑은 고딕"/>
                 <a:ea typeface="맑은 고딕"/>
               </a:rPr>
-              <a:t>•  13.6  절대값을 델타·비율로 교정한다 — 이 장의 축</a:t>
+              <a:t>•  26.6  절대값을 델타·비율로 교정한다 — 이 장의 축</a:t>
             </a:r>
           </a:p>
           <a:p>
@@ -11422,7 +11422,7 @@
                 <a:latin typeface="맑은 고딕"/>
                 <a:ea typeface="맑은 고딕"/>
               </a:rPr>
-              <a:t>•  13.7  AWR 없이도 진단은 된다 — V$의 위치</a:t>
+              <a:t>•  26.7  AWR 없이도 진단은 된다 — V$의 위치</a:t>
             </a:r>
           </a:p>
           <a:p>
@@ -12350,7 +12350,7 @@
                 <a:latin typeface="맑은 고딕"/>
                 <a:ea typeface="맑은 고딕"/>
               </a:rPr>
-              <a:t>13.7</a:t>
+              <a:t>26.7</a:t>
             </a:r>
           </a:p>
         </p:txBody>
@@ -13774,7 +13774,7 @@
                 <a:latin typeface="맑은 고딕"/>
                 <a:ea typeface="맑은 고딕"/>
               </a:rPr>
-              <a:t>13.2</a:t>
+              <a:t>26.2</a:t>
             </a:r>
           </a:p>
         </p:txBody>
@@ -15000,7 +15000,7 @@
                 <a:latin typeface="맑은 고딕"/>
                 <a:ea typeface="맑은 고딕"/>
               </a:rPr>
-              <a:t>13.3</a:t>
+              <a:t>26.3</a:t>
             </a:r>
           </a:p>
         </p:txBody>
